--- a/AirZeta_IT_Planner_Guide_KR.pptx
+++ b/AirZeta_IT_Planner_Guide_KR.pptx
@@ -4194,39 +4194,39 @@
               </a:defRPr>
             </a:pPr>
             <a:r>
-              <a:t>- D3-like SVG 프로젝션 (Mercator 변형)</a:t>
-            </a:r>
-          </a:p>
-          <a:p>
-            <a:pPr lvl="1">
-              <a:spcBef>
-                <a:spcPts val="300"/>
-              </a:spcBef>
-              <a:defRPr sz="1200">
-                <a:solidFill>
-                  <a:srgbClr val="E8EAED"/>
-                </a:solidFill>
-                <a:latin typeface="Malgun Gothic"/>
-              </a:defRPr>
-            </a:pPr>
-            <a:r>
-              <a:t>- ICN(인천, 경도 127) 중심 지도</a:t>
-            </a:r>
-          </a:p>
-          <a:p>
-            <a:pPr lvl="1">
-              <a:spcBef>
-                <a:spcPts val="300"/>
-              </a:spcBef>
-              <a:defRPr sz="1200">
-                <a:solidFill>
-                  <a:srgbClr val="E8EAED"/>
-                </a:solidFill>
-                <a:latin typeface="Malgun Gothic"/>
-              </a:defRPr>
-            </a:pPr>
-            <a:r>
-              <a:t>- 중심 경도 오프셋: 127 (기본 180 대신)</a:t>
+              <a:t>- 커스텀 Mercator SVG 프로젝션 (CENTER_LNG = 126°E)</a:t>
+            </a:r>
+          </a:p>
+          <a:p>
+            <a:pPr lvl="1">
+              <a:spcBef>
+                <a:spcPts val="300"/>
+              </a:spcBef>
+              <a:defRPr sz="1200">
+                <a:solidFill>
+                  <a:srgbClr val="E8EAED"/>
+                </a:solidFill>
+                <a:latin typeface="Malgun Gothic"/>
+              </a:defRPr>
+            </a:pPr>
+            <a:r>
+              <a:t>- ICN(인천) 중심 지도 — 경도+위도 모두 중심 배치</a:t>
+            </a:r>
+          </a:p>
+          <a:p>
+            <a:pPr lvl="1">
+              <a:spcBef>
+                <a:spcPts val="300"/>
+              </a:spcBef>
+              <a:defRPr sz="1200">
+                <a:solidFill>
+                  <a:srgbClr val="E8EAED"/>
+                </a:solidFill>
+                <a:latin typeface="Malgun Gothic"/>
+              </a:defRPr>
+            </a:pPr>
+            <a:r>
+              <a:t>- 초기 panY 오프셋으로 북반구(37°N) 수직 중심화</a:t>
             </a:r>
           </a:p>
           <a:p>
@@ -4255,55 +4255,87 @@
               </a:defRPr>
             </a:pPr>
             <a:r>
-              <a:t>인터랙션</a:t>
-            </a:r>
-          </a:p>
-          <a:p>
-            <a:pPr lvl="1">
-              <a:spcBef>
-                <a:spcPts val="300"/>
-              </a:spcBef>
-              <a:defRPr sz="1200">
-                <a:solidFill>
-                  <a:srgbClr val="E8EAED"/>
-                </a:solidFill>
-                <a:latin typeface="Malgun Gothic"/>
-              </a:defRPr>
-            </a:pPr>
-            <a:r>
-              <a:t>- 확대/축소: 마우스 휠 (1x ~ 8x), 더블클릭 2x</a:t>
-            </a:r>
-          </a:p>
-          <a:p>
-            <a:pPr lvl="1">
-              <a:spcBef>
-                <a:spcPts val="300"/>
-              </a:spcBef>
-              <a:defRPr sz="1200">
-                <a:solidFill>
-                  <a:srgbClr val="E8EAED"/>
-                </a:solidFill>
-                <a:latin typeface="Malgun Gothic"/>
-              </a:defRPr>
-            </a:pPr>
-            <a:r>
-              <a:t>- 이동: 클릭 드래그 (mousedown → mousemove → mouseup)</a:t>
-            </a:r>
-          </a:p>
-          <a:p>
-            <a:pPr lvl="1">
-              <a:spcBef>
-                <a:spcPts val="300"/>
-              </a:spcBef>
-              <a:defRPr sz="1200">
-                <a:solidFill>
-                  <a:srgbClr val="E8EAED"/>
-                </a:solidFill>
-                <a:latin typeface="Malgun Gothic"/>
-              </a:defRPr>
-            </a:pPr>
-            <a:r>
-              <a:t>- data-station 속성으로 공항 마커 vs 배경 클릭 구분</a:t>
+              <a:t>줌 시스템 (v2.1 개선)</a:t>
+            </a:r>
+          </a:p>
+          <a:p>
+            <a:pPr lvl="1">
+              <a:spcBef>
+                <a:spcPts val="300"/>
+              </a:spcBef>
+              <a:defRPr sz="1200">
+                <a:solidFill>
+                  <a:srgbClr val="E8EAED"/>
+                </a:solidFill>
+                <a:latin typeface="Malgun Gothic"/>
+              </a:defRPr>
+            </a:pPr>
+            <a:r>
+              <a:t>- SVG viewBox 고정, &lt;g transform&gt; 기반 줌/팬</a:t>
+            </a:r>
+          </a:p>
+          <a:p>
+            <a:pPr lvl="1">
+              <a:spcBef>
+                <a:spcPts val="300"/>
+              </a:spcBef>
+              <a:defRPr sz="1200">
+                <a:solidFill>
+                  <a:srgbClr val="E8EAED"/>
+                </a:solidFill>
+                <a:latin typeface="Malgun Gothic"/>
+              </a:defRPr>
+            </a:pPr>
+            <a:r>
+              <a:t>- 마커: 줌 그룹 밖에 배치 → 확대 시에도 고정 크기 유지</a:t>
+            </a:r>
+          </a:p>
+          <a:p>
+            <a:pPr lvl="1">
+              <a:spcBef>
+                <a:spcPts val="300"/>
+              </a:spcBef>
+              <a:defRPr sz="1200">
+                <a:solidFill>
+                  <a:srgbClr val="E8EAED"/>
+                </a:solidFill>
+                <a:latin typeface="Malgun Gothic"/>
+              </a:defRPr>
+            </a:pPr>
+            <a:r>
+              <a:t>- screenX = (mapX - cx) * zoom + cx + panX 공식 적용</a:t>
+            </a:r>
+          </a:p>
+          <a:p>
+            <a:pPr lvl="1">
+              <a:spcBef>
+                <a:spcPts val="300"/>
+              </a:spcBef>
+              <a:defRPr sz="1200">
+                <a:solidFill>
+                  <a:srgbClr val="E8EAED"/>
+                </a:solidFill>
+                <a:latin typeface="Malgun Gothic"/>
+              </a:defRPr>
+            </a:pPr>
+            <a:r>
+              <a:t>- 마우스 포인터 중심 줌 (스크롤/더블클릭 모두)</a:t>
+            </a:r>
+          </a:p>
+          <a:p>
+            <a:pPr lvl="1">
+              <a:spcBef>
+                <a:spcPts val="300"/>
+              </a:spcBef>
+              <a:defRPr sz="1200">
+                <a:solidFill>
+                  <a:srgbClr val="E8EAED"/>
+                </a:solidFill>
+                <a:latin typeface="Malgun Gothic"/>
+              </a:defRPr>
+            </a:pPr>
+            <a:r>
+              <a:t>- 줌 범위: 1x ~ 12x, 더블클릭 시 2x 증가</a:t>
             </a:r>
           </a:p>
           <a:p>
@@ -4364,39 +4396,23 @@
               </a:defRPr>
             </a:pPr>
             <a:r>
-              <a:t>- 위험 수준별 색상: 녹색/주황/빨강</a:t>
-            </a:r>
-          </a:p>
-          <a:p>
-            <a:pPr lvl="1">
-              <a:spcBef>
-                <a:spcPts val="300"/>
-              </a:spcBef>
-              <a:defRPr sz="1200">
-                <a:solidFill>
-                  <a:srgbClr val="E8EAED"/>
-                </a:solidFill>
-                <a:latin typeface="Malgun Gothic"/>
-              </a:defRPr>
-            </a:pPr>
-            <a:r>
-              <a:t>- 빨간 마커는 렌더링 우선순위 최상위 (z-order sorting)</a:t>
-            </a:r>
-          </a:p>
-          <a:p>
-            <a:pPr lvl="1">
-              <a:spcBef>
-                <a:spcPts val="300"/>
-              </a:spcBef>
-              <a:defRPr sz="1200">
-                <a:solidFill>
-                  <a:srgbClr val="E8EAED"/>
-                </a:solidFill>
-                <a:latin typeface="Malgun Gothic"/>
-              </a:defRPr>
-            </a:pPr>
-            <a:r>
-              <a:t>- 펄스 애니메이션 (빨강 마커)</a:t>
+              <a:t>- 위험 수준별 색상: 녹색/주황/빨강 (z-order sorting)</a:t>
+            </a:r>
+          </a:p>
+          <a:p>
+            <a:pPr lvl="1">
+              <a:spcBef>
+                <a:spcPts val="300"/>
+              </a:spcBef>
+              <a:defRPr sz="1200">
+                <a:solidFill>
+                  <a:srgbClr val="E8EAED"/>
+                </a:solidFill>
+                <a:latin typeface="Malgun Gothic"/>
+              </a:defRPr>
+            </a:pPr>
+            <a:r>
+              <a:t>- 펄스 애니메이션, 깨끗한 해양 배경 (가로줄 없음)</a:t>
             </a:r>
           </a:p>
         </p:txBody>
